--- a/apps/machap/MACHAP_事業計画_v1.pptx
+++ b/apps/machap/MACHAP_事業計画_v1.pptx
@@ -10298,14 +10298,6 @@
               <a:buNone/>
             </a:pPr>
             <a:r>
-              <a:rPr lang="en-US" sz="1300" dirty="0">
-                <a:solidFill>
-                  <a:srgbClr val="1E293B"/>
-                </a:solidFill>
-                <a:latin typeface="Calibri" pitchFamily="34" charset="0"/>
-                <a:ea typeface="Calibri" pitchFamily="34" charset="-122"/>
-                <a:cs typeface="Calibri" pitchFamily="34" charset="-120"/>
-              </a:rPr>
               <a:t>・副業・個人事業主</a:t>
             </a:r>
             <a:endParaRPr lang="en-US" sz="1300" dirty="0"/>
@@ -10317,18 +10309,10 @@
               </a:spcAft>
               <a:buNone/>
             </a:pPr>
-            <a:r>
-              <a:rPr lang="en-US" sz="1300" dirty="0">
-                <a:solidFill>
-                  <a:srgbClr val="1E293B"/>
-                </a:solidFill>
-                <a:latin typeface="Calibri" pitchFamily="34" charset="0"/>
-                <a:ea typeface="Calibri" pitchFamily="34" charset="-122"/>
-                <a:cs typeface="Calibri" pitchFamily="34" charset="-120"/>
-              </a:rPr>
-              <a:t>・スモールチーム</a:t>
-            </a:r>
             <a:endParaRPr lang="en-US" sz="1300" dirty="0"/>
+            <a:r>
+              <a:t>・スモールチーム / 個人クリエイター</a:t>
+            </a:r>
           </a:p>
           <a:p>
             <a:pPr indent="0" marL="0">
@@ -10337,18 +10321,10 @@
               </a:spcAft>
               <a:buNone/>
             </a:pPr>
-            <a:r>
-              <a:rPr lang="en-US" sz="1300" dirty="0">
-                <a:solidFill>
-                  <a:srgbClr val="1E293B"/>
-                </a:solidFill>
-                <a:latin typeface="Calibri" pitchFamily="34" charset="0"/>
-                <a:ea typeface="Calibri" pitchFamily="34" charset="-122"/>
-                <a:cs typeface="Calibri" pitchFamily="34" charset="-120"/>
-              </a:rPr>
-              <a:t>・個人クリエイター</a:t>
-            </a:r>
             <a:endParaRPr lang="en-US" sz="1300" dirty="0"/>
+            <a:r>
+              <a:t>・AI活用をできていない個人</a:t>
+            </a:r>
           </a:p>
           <a:p>
             <a:pPr indent="0" marL="0">
@@ -10357,18 +10333,10 @@
               </a:spcAft>
               <a:buNone/>
             </a:pPr>
-            <a:r>
-              <a:rPr lang="en-US" sz="1300" dirty="0">
-                <a:solidFill>
-                  <a:srgbClr val="1E293B"/>
-                </a:solidFill>
-                <a:latin typeface="Calibri" pitchFamily="34" charset="0"/>
-                <a:ea typeface="Calibri" pitchFamily="34" charset="-122"/>
-                <a:cs typeface="Calibri" pitchFamily="34" charset="-120"/>
-              </a:rPr>
-              <a:t>・課題を抱えた会社員</a:t>
-            </a:r>
             <a:endParaRPr lang="en-US" sz="1300" dirty="0"/>
+            <a:r>
+              <a:t>・飲食店・店舗経営者</a:t>
+            </a:r>
           </a:p>
           <a:p>
             <a:pPr indent="0" marL="0">
@@ -10377,18 +10345,10 @@
               </a:spcAft>
               <a:buNone/>
             </a:pPr>
-            <a:r>
-              <a:rPr lang="en-US" sz="1300" dirty="0">
-                <a:solidFill>
-                  <a:srgbClr val="1E293B"/>
-                </a:solidFill>
-                <a:latin typeface="Calibri" pitchFamily="34" charset="0"/>
-                <a:ea typeface="Calibri" pitchFamily="34" charset="-122"/>
-                <a:cs typeface="Calibri" pitchFamily="34" charset="-120"/>
-              </a:rPr>
-              <a:t>・IT活用したい中小企業</a:t>
-            </a:r>
             <a:endParaRPr lang="en-US" sz="1300" dirty="0"/>
+            <a:r>
+              <a:t>・事業経営者 / 中小企業</a:t>
+            </a:r>
           </a:p>
         </p:txBody>
       </p:sp>
@@ -10594,7 +10554,7 @@
                 <a:ea typeface="Calibri" pitchFamily="34" charset="-122"/>
                 <a:cs typeface="Calibri" pitchFamily="34" charset="-120"/>
               </a:rPr>
-              <a:t>副業・フリーランスとして</a:t>
+              <a:t>個人・副業者・店舗経営者・</a:t>
             </a:r>
             <a:endParaRPr lang="en-US" sz="1300" dirty="0"/>
           </a:p>
@@ -10614,7 +10574,7 @@
                 <a:ea typeface="Calibri" pitchFamily="34" charset="-122"/>
                 <a:cs typeface="Calibri" pitchFamily="34" charset="-120"/>
               </a:rPr>
-              <a:t>動いている個人・小チーム</a:t>
+              <a:t>AI活用したい事業者</a:t>
             </a:r>
             <a:endParaRPr lang="en-US" sz="1300" dirty="0"/>
           </a:p>
@@ -15940,67 +15900,6 @@
       </p:sp>
       <p:sp>
         <p:nvSpPr>
-          <p:cNvPr id="5" name="Shape 3"/>
-          <p:cNvSpPr/>
-          <p:nvPr/>
-        </p:nvSpPr>
-        <p:spPr>
-          <a:xfrm>
-            <a:off x="1261872" y="1097280"/>
-            <a:ext cx="1133856" cy="1133856"/>
-          </a:xfrm>
-          <a:prstGeom prst="roundRect">
-            <a:avLst>
-              <a:gd name="adj" fmla="val 40323"/>
-            </a:avLst>
-          </a:prstGeom>
-          <a:solidFill>
-            <a:srgbClr val="1A56DB"/>
-          </a:solidFill>
-          <a:ln/>
-        </p:spPr>
-      </p:sp>
-      <p:sp>
-        <p:nvSpPr>
-          <p:cNvPr id="6" name="Text 4"/>
-          <p:cNvSpPr/>
-          <p:nvPr/>
-        </p:nvSpPr>
-        <p:spPr>
-          <a:xfrm>
-            <a:off x="1261872" y="1097280"/>
-            <a:ext cx="1133856" cy="1133856"/>
-          </a:xfrm>
-          <a:prstGeom prst="rect">
-            <a:avLst/>
-          </a:prstGeom>
-          <a:noFill/>
-          <a:ln/>
-        </p:spPr>
-        <p:txBody>
-          <a:bodyPr wrap="square" rtlCol="0" anchor="ctr"/>
-          <a:lstStyle/>
-          <a:p>
-            <a:pPr algn="ctr" indent="0" marL="0">
-              <a:buNone/>
-            </a:pPr>
-            <a:r>
-              <a:rPr lang="en-US" sz="3400" b="1" dirty="0">
-                <a:solidFill>
-                  <a:srgbClr val="FFFFFF"/>
-                </a:solidFill>
-                <a:latin typeface="Calibri" pitchFamily="34" charset="0"/>
-                <a:ea typeface="Calibri" pitchFamily="34" charset="-122"/>
-                <a:cs typeface="Calibri" pitchFamily="34" charset="-120"/>
-              </a:rPr>
-              <a:t>サ</a:t>
-            </a:r>
-            <a:endParaRPr lang="en-US" sz="3400" dirty="0"/>
-          </a:p>
-        </p:txBody>
-      </p:sp>
-      <p:sp>
-        <p:nvSpPr>
           <p:cNvPr id="7" name="Text 5"/>
           <p:cNvSpPr/>
           <p:nvPr/>
@@ -16124,67 +16023,6 @@
       </p:sp>
       <p:sp>
         <p:nvSpPr>
-          <p:cNvPr id="11" name="Shape 9"/>
-          <p:cNvSpPr/>
-          <p:nvPr/>
-        </p:nvSpPr>
-        <p:spPr>
-          <a:xfrm>
-            <a:off x="3959352" y="1097280"/>
-            <a:ext cx="1133856" cy="1133856"/>
-          </a:xfrm>
-          <a:prstGeom prst="roundRect">
-            <a:avLst>
-              <a:gd name="adj" fmla="val 40323"/>
-            </a:avLst>
-          </a:prstGeom>
-          <a:solidFill>
-            <a:srgbClr val="06B6D4"/>
-          </a:solidFill>
-          <a:ln/>
-        </p:spPr>
-      </p:sp>
-      <p:sp>
-        <p:nvSpPr>
-          <p:cNvPr id="12" name="Text 10"/>
-          <p:cNvSpPr/>
-          <p:nvPr/>
-        </p:nvSpPr>
-        <p:spPr>
-          <a:xfrm>
-            <a:off x="3959352" y="1097280"/>
-            <a:ext cx="1133856" cy="1133856"/>
-          </a:xfrm>
-          <a:prstGeom prst="rect">
-            <a:avLst/>
-          </a:prstGeom>
-          <a:noFill/>
-          <a:ln/>
-        </p:spPr>
-        <p:txBody>
-          <a:bodyPr wrap="square" rtlCol="0" anchor="ctr"/>
-          <a:lstStyle/>
-          <a:p>
-            <a:pPr algn="ctr" indent="0" marL="0">
-              <a:buNone/>
-            </a:pPr>
-            <a:r>
-              <a:rPr lang="en-US" sz="3400" b="1" dirty="0">
-                <a:solidFill>
-                  <a:srgbClr val="FFFFFF"/>
-                </a:solidFill>
-                <a:latin typeface="Calibri" pitchFamily="34" charset="0"/>
-                <a:ea typeface="Calibri" pitchFamily="34" charset="-122"/>
-                <a:cs typeface="Calibri" pitchFamily="34" charset="-120"/>
-              </a:rPr>
-              <a:t>中</a:t>
-            </a:r>
-            <a:endParaRPr lang="en-US" sz="3400" dirty="0"/>
-          </a:p>
-        </p:txBody>
-      </p:sp>
-      <p:sp>
-        <p:nvSpPr>
           <p:cNvPr id="13" name="Text 11"/>
           <p:cNvSpPr/>
           <p:nvPr/>
@@ -16305,67 +16143,6 @@
             <a:prstDash val="solid"/>
           </a:ln>
         </p:spPr>
-      </p:sp>
-      <p:sp>
-        <p:nvSpPr>
-          <p:cNvPr id="17" name="Shape 15"/>
-          <p:cNvSpPr/>
-          <p:nvPr/>
-        </p:nvSpPr>
-        <p:spPr>
-          <a:xfrm>
-            <a:off x="6656832" y="1097280"/>
-            <a:ext cx="1133856" cy="1133856"/>
-          </a:xfrm>
-          <a:prstGeom prst="roundRect">
-            <a:avLst>
-              <a:gd name="adj" fmla="val 40323"/>
-            </a:avLst>
-          </a:prstGeom>
-          <a:solidFill>
-            <a:srgbClr val="F97316"/>
-          </a:solidFill>
-          <a:ln/>
-        </p:spPr>
-      </p:sp>
-      <p:sp>
-        <p:nvSpPr>
-          <p:cNvPr id="18" name="Text 16"/>
-          <p:cNvSpPr/>
-          <p:nvPr/>
-        </p:nvSpPr>
-        <p:spPr>
-          <a:xfrm>
-            <a:off x="6656832" y="1097280"/>
-            <a:ext cx="1133856" cy="1133856"/>
-          </a:xfrm>
-          <a:prstGeom prst="rect">
-            <a:avLst/>
-          </a:prstGeom>
-          <a:noFill/>
-          <a:ln/>
-        </p:spPr>
-        <p:txBody>
-          <a:bodyPr wrap="square" rtlCol="0" anchor="ctr"/>
-          <a:lstStyle/>
-          <a:p>
-            <a:pPr algn="ctr" indent="0" marL="0">
-              <a:buNone/>
-            </a:pPr>
-            <a:r>
-              <a:rPr lang="en-US" sz="3400" b="1" dirty="0">
-                <a:solidFill>
-                  <a:srgbClr val="FFFFFF"/>
-                </a:solidFill>
-                <a:latin typeface="Calibri" pitchFamily="34" charset="0"/>
-                <a:ea typeface="Calibri" pitchFamily="34" charset="-122"/>
-                <a:cs typeface="Calibri" pitchFamily="34" charset="-120"/>
-              </a:rPr>
-              <a:t>師</a:t>
-            </a:r>
-            <a:endParaRPr lang="en-US" sz="3400" dirty="0"/>
-          </a:p>
-        </p:txBody>
       </p:sp>
       <p:sp>
         <p:nvSpPr>

--- a/apps/machap/MACHAP_事業計画_v1.pptx
+++ b/apps/machap/MACHAP_事業計画_v1.pptx
@@ -10298,6 +10298,14 @@
               <a:buNone/>
             </a:pPr>
             <a:r>
+              <a:rPr lang="en-US" sz="1300" dirty="0">
+                <a:solidFill>
+                  <a:srgbClr val="1E293B"/>
+                </a:solidFill>
+                <a:latin typeface="Calibri" pitchFamily="34" charset="0"/>
+                <a:ea typeface="Calibri" pitchFamily="34" charset="-122"/>
+                <a:cs typeface="Calibri" pitchFamily="34" charset="-120"/>
+              </a:rPr>
               <a:t>・副業・個人事業主</a:t>
             </a:r>
             <a:endParaRPr lang="en-US" sz="1300" dirty="0"/>
@@ -10311,6 +10319,14 @@
             </a:pPr>
             <a:endParaRPr lang="en-US" sz="1300" dirty="0"/>
             <a:r>
+              <a:rPr lang="en-US" sz="1300" dirty="0">
+                <a:solidFill>
+                  <a:srgbClr val="1E293B"/>
+                </a:solidFill>
+                <a:latin typeface="Calibri" pitchFamily="34" charset="0"/>
+                <a:ea typeface="Calibri" pitchFamily="34" charset="-122"/>
+                <a:cs typeface="Calibri" pitchFamily="34" charset="-120"/>
+              </a:rPr>
               <a:t>・スモールチーム / 個人クリエイター</a:t>
             </a:r>
           </a:p>
@@ -10323,6 +10339,14 @@
             </a:pPr>
             <a:endParaRPr lang="en-US" sz="1300" dirty="0"/>
             <a:r>
+              <a:rPr lang="en-US" sz="1300" dirty="0">
+                <a:solidFill>
+                  <a:srgbClr val="1E293B"/>
+                </a:solidFill>
+                <a:latin typeface="Calibri" pitchFamily="34" charset="0"/>
+                <a:ea typeface="Calibri" pitchFamily="34" charset="-122"/>
+                <a:cs typeface="Calibri" pitchFamily="34" charset="-120"/>
+              </a:rPr>
               <a:t>・AI活用をできていない個人</a:t>
             </a:r>
           </a:p>
@@ -10335,6 +10359,14 @@
             </a:pPr>
             <a:endParaRPr lang="en-US" sz="1300" dirty="0"/>
             <a:r>
+              <a:rPr lang="en-US" sz="1300" dirty="0">
+                <a:solidFill>
+                  <a:srgbClr val="1E293B"/>
+                </a:solidFill>
+                <a:latin typeface="Calibri" pitchFamily="34" charset="0"/>
+                <a:ea typeface="Calibri" pitchFamily="34" charset="-122"/>
+                <a:cs typeface="Calibri" pitchFamily="34" charset="-120"/>
+              </a:rPr>
               <a:t>・飲食店・店舗経営者</a:t>
             </a:r>
           </a:p>
@@ -10347,6 +10379,14 @@
             </a:pPr>
             <a:endParaRPr lang="en-US" sz="1300" dirty="0"/>
             <a:r>
+              <a:rPr lang="en-US" sz="1300" dirty="0">
+                <a:solidFill>
+                  <a:srgbClr val="1E293B"/>
+                </a:solidFill>
+                <a:latin typeface="Calibri" pitchFamily="34" charset="0"/>
+                <a:ea typeface="Calibri" pitchFamily="34" charset="-122"/>
+                <a:cs typeface="Calibri" pitchFamily="34" charset="-120"/>
+              </a:rPr>
               <a:t>・事業経営者 / 中小企業</a:t>
             </a:r>
           </a:p>
